--- a/public/decks/emoji-decode.pptx
+++ b/public/decks/emoji-decode.pptx
@@ -168,7 +168,7 @@
                 <a:latin typeface="Segoe UI"/>
                 <a:cs typeface="Segoe UI"/>
               </a:rPr>
-              <a:t>Emoji Decode</a:t>
+              <a:t>Image Decode</a:t>
             </a:r>
           </a:p>
         </p:txBody>
